--- a/media/resources/files/Onduktar_Koshuu_Kemituu_Bingo_ZVvuQHt.pptx
+++ b/media/resources/files/Onduktar_Koshuu_Kemituu_Bingo_ZVvuQHt.pptx
@@ -37555,7 +37555,7 @@
             </a:pPr>
             <a:r>
               <a:rPr lang="ru-RU" dirty="0"/>
-              <a:t>Турдуу пикирлер учун ыраазычылык билдиребиз.</a:t>
+              <a:t>Түрдүү пикирлер үчүн ыраазычылык билдиребиз.</a:t>
             </a:r>
           </a:p>
           <a:p>

--- a/media/resources/files/Onduktar_Koshuu_Kemituu_Bingo_ZVvuQHt.pptx
+++ b/media/resources/files/Onduktar_Koshuu_Kemituu_Bingo_ZVvuQHt.pptx
@@ -10031,7 +10031,7 @@
                 <a:ea typeface="+mn-ea"/>
                 <a:cs typeface="+mn-cs"/>
               </a:rPr>
-              <a:t>– Бинго ,жооптору менен</a:t>
+              <a:t>– Бинго,жооптору менен</a:t>
             </a:r>
             <a:endParaRPr kumimoji="0" lang="en-US" sz="1800" b="0" i="0" u="none" strike="noStrike" kern="1200" cap="none" spc="0" normalizeH="0" baseline="0" noProof="0" dirty="0">
               <a:ln>
@@ -10114,7 +10114,7 @@
                 <a:ea typeface="+mn-ea"/>
                 <a:cs typeface="+mn-cs"/>
               </a:rPr>
-              <a:t>Окуучулар </a:t>
+              <a:t>Окуучулар тордон тогуз жоопту тандап, дептердеги 3х3 чакмакка каалагандай коюшат.</a:t>
             </a:r>
             <a:r>
               <a:rPr kumimoji="0" lang="ru-RU" sz="2000" b="0" i="0" u="none" strike="noStrike" kern="1200" cap="none" spc="0" normalizeH="0" baseline="0" noProof="0" dirty="0">
@@ -10131,7 +10131,7 @@
                 <a:ea typeface="+mn-ea"/>
                 <a:cs typeface="+mn-cs"/>
               </a:rPr>
-              <a:t>суроо</a:t>
+              <a:t/>
             </a:r>
             <a:r>
               <a:rPr kumimoji="0" lang="en-US" sz="2000" b="0" i="0" u="none" strike="noStrike" kern="1200" cap="none" spc="0" normalizeH="0" baseline="0" noProof="0" dirty="0">
@@ -10148,7 +10148,7 @@
                 <a:ea typeface="+mn-ea"/>
                 <a:cs typeface="+mn-cs"/>
               </a:rPr>
-              <a:t> </a:t>
+              <a:t/>
             </a:r>
             <a:r>
               <a:rPr kumimoji="0" lang="en-US" sz="2000" b="0" i="0" u="none" strike="noStrike" kern="1200" cap="none" spc="0" normalizeH="0" baseline="0" noProof="0" dirty="0" err="1">
@@ -10165,7 +10165,7 @@
                 <a:ea typeface="+mn-ea"/>
                 <a:cs typeface="+mn-cs"/>
               </a:rPr>
-              <a:t>тордон</a:t>
+              <a:t/>
             </a:r>
             <a:r>
               <a:rPr kumimoji="0" lang="en-US" sz="2000" b="0" i="0" u="none" strike="noStrike" kern="1200" cap="none" spc="0" normalizeH="0" baseline="0" noProof="0" dirty="0">
@@ -10182,7 +10182,7 @@
                 <a:ea typeface="+mn-ea"/>
                 <a:cs typeface="+mn-cs"/>
               </a:rPr>
-              <a:t> </a:t>
+              <a:t/>
             </a:r>
             <a:r>
               <a:rPr kumimoji="0" lang="en-US" sz="1800" b="0" i="0" u="none" strike="noStrike" kern="1200" cap="none" spc="0" normalizeH="0" baseline="0" noProof="0" dirty="0" err="1">
@@ -10199,7 +10199,7 @@
                 <a:ea typeface="+mn-ea"/>
                 <a:cs typeface="+mn-cs"/>
               </a:rPr>
-              <a:t>тогуз</a:t>
+              <a:t/>
             </a:r>
             <a:r>
               <a:rPr kumimoji="0" lang="en-US" sz="1800" b="0" i="0" u="none" strike="noStrike" kern="1200" cap="none" spc="0" normalizeH="0" baseline="0" noProof="0" dirty="0">
@@ -10216,7 +10216,7 @@
                 <a:ea typeface="+mn-ea"/>
                 <a:cs typeface="+mn-cs"/>
               </a:rPr>
-              <a:t> </a:t>
+              <a:t/>
             </a:r>
             <a:r>
               <a:rPr kumimoji="0" lang="en-US" sz="1800" b="0" i="0" u="none" strike="noStrike" kern="1200" cap="none" spc="0" normalizeH="0" baseline="0" noProof="0" dirty="0" err="1">
@@ -10233,7 +10233,7 @@
                 <a:ea typeface="+mn-ea"/>
                 <a:cs typeface="+mn-cs"/>
               </a:rPr>
-              <a:t>жоопту</a:t>
+              <a:t/>
             </a:r>
             <a:r>
               <a:rPr kumimoji="0" lang="en-US" sz="1800" b="0" i="0" u="none" strike="noStrike" kern="1200" cap="none" spc="0" normalizeH="0" baseline="0" noProof="0" dirty="0">
@@ -10250,7 +10250,7 @@
                 <a:ea typeface="+mn-ea"/>
                 <a:cs typeface="+mn-cs"/>
               </a:rPr>
-              <a:t> </a:t>
+              <a:t/>
             </a:r>
             <a:r>
               <a:rPr kumimoji="0" lang="en-US" sz="1800" b="0" i="0" u="none" strike="noStrike" kern="1200" cap="none" spc="0" normalizeH="0" baseline="0" noProof="0" dirty="0" err="1">
@@ -10267,7 +10267,7 @@
                 <a:ea typeface="+mn-ea"/>
                 <a:cs typeface="+mn-cs"/>
               </a:rPr>
-              <a:t>тандап</a:t>
+              <a:t/>
             </a:r>
             <a:r>
               <a:rPr kumimoji="0" lang="en-US" sz="1800" b="0" i="0" u="none" strike="noStrike" kern="1200" cap="none" spc="0" normalizeH="0" baseline="0" noProof="0" dirty="0">
@@ -10284,7 +10284,7 @@
                 <a:ea typeface="+mn-ea"/>
                 <a:cs typeface="+mn-cs"/>
               </a:rPr>
-              <a:t>, </a:t>
+              <a:t/>
             </a:r>
             <a:r>
               <a:rPr kumimoji="0" lang="en-US" sz="1800" b="0" i="0" u="none" strike="noStrike" kern="1200" cap="none" spc="0" normalizeH="0" baseline="0" noProof="0" dirty="0" err="1">
@@ -10301,7 +10301,7 @@
                 <a:ea typeface="+mn-ea"/>
                 <a:cs typeface="+mn-cs"/>
               </a:rPr>
-              <a:t>аларды</a:t>
+              <a:t/>
             </a:r>
             <a:r>
               <a:rPr kumimoji="0" lang="en-US" sz="1800" b="0" i="0" u="none" strike="noStrike" kern="1200" cap="none" spc="0" normalizeH="0" baseline="0" noProof="0" dirty="0">
@@ -10318,7 +10318,7 @@
                 <a:ea typeface="+mn-ea"/>
                 <a:cs typeface="+mn-cs"/>
               </a:rPr>
-              <a:t> </a:t>
+              <a:t/>
             </a:r>
             <a:r>
               <a:rPr kumimoji="0" lang="ru-RU" sz="1800" b="0" i="0" u="none" strike="noStrike" kern="1200" cap="none" spc="0" normalizeH="0" baseline="0" noProof="0" dirty="0">
@@ -10335,7 +10335,7 @@
                 <a:ea typeface="+mn-ea"/>
                 <a:cs typeface="+mn-cs"/>
               </a:rPr>
-              <a:t>дептериндеги</a:t>
+              <a:t/>
             </a:r>
             <a:r>
               <a:rPr kumimoji="0" lang="en-US" sz="1800" b="0" i="0" u="none" strike="noStrike" kern="1200" cap="none" spc="0" normalizeH="0" baseline="0" noProof="0" dirty="0">
@@ -10352,7 +10352,7 @@
                 <a:ea typeface="+mn-ea"/>
                 <a:cs typeface="+mn-cs"/>
               </a:rPr>
-              <a:t> 3х3 </a:t>
+              <a:t/>
             </a:r>
             <a:r>
               <a:rPr kumimoji="0" lang="en-US" sz="1800" b="0" i="0" u="none" strike="noStrike" kern="1200" cap="none" spc="0" normalizeH="0" baseline="0" noProof="0" dirty="0" err="1">
@@ -10369,7 +10369,7 @@
                 <a:ea typeface="+mn-ea"/>
                 <a:cs typeface="+mn-cs"/>
               </a:rPr>
-              <a:t>квадратка</a:t>
+              <a:t/>
             </a:r>
             <a:r>
               <a:rPr kumimoji="0" lang="en-US" sz="1800" b="0" i="0" u="none" strike="noStrike" kern="1200" cap="none" spc="0" normalizeH="0" baseline="0" noProof="0" dirty="0">
@@ -10386,7 +10386,7 @@
                 <a:ea typeface="+mn-ea"/>
                 <a:cs typeface="+mn-cs"/>
               </a:rPr>
-              <a:t> </a:t>
+              <a:t/>
             </a:r>
             <a:r>
               <a:rPr kumimoji="0" lang="en-US" sz="1800" b="0" i="0" u="none" strike="noStrike" kern="1200" cap="none" spc="0" normalizeH="0" baseline="0" noProof="0" dirty="0" err="1">
@@ -10403,7 +10403,7 @@
                 <a:ea typeface="+mn-ea"/>
                 <a:cs typeface="+mn-cs"/>
               </a:rPr>
-              <a:t>туш</a:t>
+              <a:t/>
             </a:r>
             <a:r>
               <a:rPr kumimoji="0" lang="en-US" sz="1800" b="0" i="0" u="none" strike="noStrike" kern="1200" cap="none" spc="0" normalizeH="0" baseline="0" noProof="0" dirty="0">
@@ -10420,7 +10420,7 @@
                 <a:ea typeface="+mn-ea"/>
                 <a:cs typeface="+mn-cs"/>
               </a:rPr>
-              <a:t> </a:t>
+              <a:t/>
             </a:r>
             <a:r>
               <a:rPr kumimoji="0" lang="en-US" sz="1800" b="0" i="0" u="none" strike="noStrike" kern="1200" cap="none" spc="0" normalizeH="0" baseline="0" noProof="0" dirty="0" err="1">
@@ -10437,7 +10437,7 @@
                 <a:ea typeface="+mn-ea"/>
                 <a:cs typeface="+mn-cs"/>
               </a:rPr>
-              <a:t>келди</a:t>
+              <a:t/>
             </a:r>
             <a:r>
               <a:rPr kumimoji="0" lang="en-US" sz="1800" b="0" i="0" u="none" strike="noStrike" kern="1200" cap="none" spc="0" normalizeH="0" baseline="0" noProof="0" dirty="0">
@@ -10454,7 +10454,7 @@
                 <a:ea typeface="+mn-ea"/>
                 <a:cs typeface="+mn-cs"/>
               </a:rPr>
-              <a:t> </a:t>
+              <a:t/>
             </a:r>
             <a:r>
               <a:rPr kumimoji="0" lang="en-US" sz="1800" b="0" i="0" u="none" strike="noStrike" kern="1200" cap="none" spc="0" normalizeH="0" baseline="0" noProof="0" dirty="0" err="1">
@@ -10471,7 +10471,7 @@
                 <a:ea typeface="+mn-ea"/>
                 <a:cs typeface="+mn-cs"/>
               </a:rPr>
-              <a:t>жайгаштырышы</a:t>
+              <a:t/>
             </a:r>
             <a:r>
               <a:rPr kumimoji="0" lang="en-US" sz="1800" b="0" i="0" u="none" strike="noStrike" kern="1200" cap="none" spc="0" normalizeH="0" baseline="0" noProof="0" dirty="0">
@@ -10488,7 +10488,7 @@
                 <a:ea typeface="+mn-ea"/>
                 <a:cs typeface="+mn-cs"/>
               </a:rPr>
-              <a:t> </a:t>
+              <a:t/>
             </a:r>
             <a:r>
               <a:rPr kumimoji="0" lang="en-US" sz="1800" b="0" i="0" u="none" strike="noStrike" kern="1200" cap="none" spc="0" normalizeH="0" baseline="0" noProof="0" dirty="0" err="1">
@@ -10505,7 +10505,7 @@
                 <a:ea typeface="+mn-ea"/>
                 <a:cs typeface="+mn-cs"/>
               </a:rPr>
-              <a:t>керек</a:t>
+              <a:t/>
             </a:r>
             <a:r>
               <a:rPr kumimoji="0" lang="en-US" sz="1800" b="0" i="0" u="none" strike="noStrike" kern="1200" cap="none" spc="0" normalizeH="0" baseline="0" noProof="0" dirty="0">
@@ -10522,7 +10522,7 @@
                 <a:ea typeface="+mn-ea"/>
                 <a:cs typeface="+mn-cs"/>
               </a:rPr>
-              <a:t>.</a:t>
+              <a:t/>
             </a:r>
           </a:p>
           <a:p>
@@ -11797,7 +11797,7 @@
             <a:pPr algn="ctr"/>
             <a:r>
               <a:rPr lang="en-US" sz="2400" dirty="0"/>
-              <a:t>C</a:t>
+              <a:t>С</a:t>
             </a:r>
             <a:r>
               <a:rPr lang="ru-RU" sz="2400" dirty="0"/>
@@ -12947,7 +12947,7 @@
                   <a:schemeClr val="tx1"/>
                 </a:solidFill>
               </a:rPr>
-              <a:t>0.4</a:t>
+              <a:t>0,4</a:t>
             </a:r>
           </a:p>
         </p:txBody>
@@ -13349,7 +13349,7 @@
             <a:pPr algn="ctr"/>
             <a:r>
               <a:rPr lang="en-US" sz="2400" dirty="0"/>
-              <a:t>C</a:t>
+              <a:t>С</a:t>
             </a:r>
             <a:r>
               <a:rPr lang="ru-RU" sz="2400" dirty="0"/>
@@ -14499,7 +14499,7 @@
                   <a:schemeClr val="tx1"/>
                 </a:solidFill>
               </a:rPr>
-              <a:t>0.9</a:t>
+              <a:t>0,9</a:t>
             </a:r>
           </a:p>
         </p:txBody>
@@ -14901,7 +14901,7 @@
             <a:pPr algn="ctr"/>
             <a:r>
               <a:rPr lang="en-US" sz="2400" dirty="0"/>
-              <a:t>C</a:t>
+              <a:t>С</a:t>
             </a:r>
             <a:r>
               <a:rPr lang="ru-RU" sz="2400" dirty="0"/>
@@ -16211,7 +16211,7 @@
                   <a:schemeClr val="tx1"/>
                 </a:solidFill>
               </a:rPr>
-              <a:t>14.3</a:t>
+              <a:t>14,3</a:t>
             </a:r>
           </a:p>
         </p:txBody>
@@ -16584,7 +16584,7 @@
             <a:pPr algn="ctr"/>
             <a:r>
               <a:rPr lang="en-US" sz="2400" dirty="0"/>
-              <a:t>C</a:t>
+              <a:t>С</a:t>
             </a:r>
             <a:r>
               <a:rPr lang="ru-RU" sz="2400" dirty="0"/>
@@ -17894,7 +17894,7 @@
                   <a:schemeClr val="tx1"/>
                 </a:solidFill>
               </a:rPr>
-              <a:t>3.2</a:t>
+              <a:t>3,2</a:t>
             </a:r>
           </a:p>
         </p:txBody>
@@ -18267,7 +18267,7 @@
             <a:pPr algn="ctr"/>
             <a:r>
               <a:rPr lang="en-US" sz="2400" dirty="0"/>
-              <a:t>C</a:t>
+              <a:t>С</a:t>
             </a:r>
             <a:r>
               <a:rPr lang="ru-RU" sz="2400" dirty="0"/>
@@ -19417,7 +19417,7 @@
                   <a:schemeClr val="tx1"/>
                 </a:solidFill>
               </a:rPr>
-              <a:t>5.4</a:t>
+              <a:t>5,4</a:t>
             </a:r>
           </a:p>
         </p:txBody>
@@ -19819,7 +19819,7 @@
             <a:pPr algn="ctr"/>
             <a:r>
               <a:rPr lang="en-US" sz="2400" dirty="0"/>
-              <a:t>C</a:t>
+              <a:t>С</a:t>
             </a:r>
             <a:r>
               <a:rPr lang="ru-RU" sz="2400" dirty="0"/>
@@ -21129,7 +21129,7 @@
                   <a:schemeClr val="tx1"/>
                 </a:solidFill>
               </a:rPr>
-              <a:t>8.5</a:t>
+              <a:t>8,5</a:t>
             </a:r>
           </a:p>
         </p:txBody>
@@ -21502,7 +21502,7 @@
             <a:pPr algn="ctr"/>
             <a:r>
               <a:rPr lang="en-US" sz="2400" dirty="0"/>
-              <a:t>C</a:t>
+              <a:t>С</a:t>
             </a:r>
             <a:r>
               <a:rPr lang="ru-RU" sz="2400" dirty="0"/>
@@ -22652,7 +22652,7 @@
                   <a:schemeClr val="tx1"/>
                 </a:solidFill>
               </a:rPr>
-              <a:t>5.0</a:t>
+              <a:t>5,0</a:t>
             </a:r>
           </a:p>
         </p:txBody>
@@ -23054,7 +23054,7 @@
             <a:pPr algn="ctr"/>
             <a:r>
               <a:rPr lang="en-US" sz="2400" dirty="0"/>
-              <a:t>C</a:t>
+              <a:t>С</a:t>
             </a:r>
             <a:r>
               <a:rPr lang="ru-RU" sz="2400" dirty="0"/>
@@ -24364,7 +24364,7 @@
                   <a:schemeClr val="tx1"/>
                 </a:solidFill>
               </a:rPr>
-              <a:t>16.1</a:t>
+              <a:t>16,1</a:t>
             </a:r>
           </a:p>
         </p:txBody>
@@ -24737,7 +24737,7 @@
             <a:pPr algn="ctr"/>
             <a:r>
               <a:rPr lang="en-US" sz="2400" dirty="0"/>
-              <a:t>C</a:t>
+              <a:t>С</a:t>
             </a:r>
             <a:r>
               <a:rPr lang="ru-RU" sz="2400" dirty="0"/>
@@ -25887,7 +25887,7 @@
                   <a:schemeClr val="tx1"/>
                 </a:solidFill>
               </a:rPr>
-              <a:t>0.7</a:t>
+              <a:t>0,7</a:t>
             </a:r>
           </a:p>
         </p:txBody>
@@ -26289,7 +26289,7 @@
             <a:pPr algn="ctr"/>
             <a:r>
               <a:rPr lang="en-US" sz="2400" dirty="0"/>
-              <a:t>C</a:t>
+              <a:t>С</a:t>
             </a:r>
             <a:r>
               <a:rPr lang="ru-RU" sz="2400" dirty="0"/>
@@ -27439,7 +27439,7 @@
                   <a:schemeClr val="tx1"/>
                 </a:solidFill>
               </a:rPr>
-              <a:t>1.7</a:t>
+              <a:t>1,7</a:t>
             </a:r>
           </a:p>
         </p:txBody>
@@ -37706,7 +37706,7 @@
                           <a:ea typeface="+mn-ea"/>
                           <a:cs typeface="+mn-cs"/>
                         </a:rPr>
-                        <a:t>13.5</a:t>
+                        <a:t>13,5</a:t>
                       </a:r>
                     </a:p>
                   </a:txBody>
@@ -37789,7 +37789,7 @@
                           <a:ea typeface="+mn-ea"/>
                           <a:cs typeface="+mn-cs"/>
                         </a:rPr>
-                        <a:t>14.3</a:t>
+                        <a:t>14,3</a:t>
                       </a:r>
                     </a:p>
                   </a:txBody>
@@ -37872,7 +37872,7 @@
                           <a:ea typeface="+mn-ea"/>
                           <a:cs typeface="+mn-cs"/>
                         </a:rPr>
-                        <a:t>3.2</a:t>
+                        <a:t>3,2</a:t>
                       </a:r>
                     </a:p>
                   </a:txBody>
@@ -37955,7 +37955,7 @@
                           <a:ea typeface="+mn-ea"/>
                           <a:cs typeface="+mn-cs"/>
                         </a:rPr>
-                        <a:t>5.3</a:t>
+                        <a:t>5,3</a:t>
                       </a:r>
                     </a:p>
                   </a:txBody>
@@ -38045,7 +38045,7 @@
                           <a:ea typeface="+mn-ea"/>
                           <a:cs typeface="+mn-cs"/>
                         </a:rPr>
-                        <a:t>1.7</a:t>
+                        <a:t>1,7</a:t>
                       </a:r>
                     </a:p>
                   </a:txBody>
@@ -38128,7 +38128,7 @@
                           <a:ea typeface="+mn-ea"/>
                           <a:cs typeface="+mn-cs"/>
                         </a:rPr>
-                        <a:t>5.0</a:t>
+                        <a:t>5,0</a:t>
                       </a:r>
                     </a:p>
                   </a:txBody>
@@ -38211,7 +38211,7 @@
                           <a:ea typeface="+mn-ea"/>
                           <a:cs typeface="+mn-cs"/>
                         </a:rPr>
-                        <a:t>12.2</a:t>
+                        <a:t>12,2</a:t>
                       </a:r>
                     </a:p>
                   </a:txBody>
@@ -38294,7 +38294,7 @@
                           <a:ea typeface="+mn-ea"/>
                           <a:cs typeface="+mn-cs"/>
                         </a:rPr>
-                        <a:t>10.4</a:t>
+                        <a:t>10,4</a:t>
                       </a:r>
                     </a:p>
                   </a:txBody>
@@ -38384,7 +38384,7 @@
                           <a:ea typeface="+mn-ea"/>
                           <a:cs typeface="+mn-cs"/>
                         </a:rPr>
-                        <a:t>6.4</a:t>
+                        <a:t>6,4</a:t>
                       </a:r>
                     </a:p>
                   </a:txBody>
@@ -38467,7 +38467,7 @@
                           <a:ea typeface="+mn-ea"/>
                           <a:cs typeface="+mn-cs"/>
                         </a:rPr>
-                        <a:t>0.7</a:t>
+                        <a:t>0,7</a:t>
                       </a:r>
                     </a:p>
                   </a:txBody>
@@ -38550,7 +38550,7 @@
                           <a:ea typeface="+mn-ea"/>
                           <a:cs typeface="+mn-cs"/>
                         </a:rPr>
-                        <a:t>5.4</a:t>
+                        <a:t>5,4</a:t>
                       </a:r>
                     </a:p>
                   </a:txBody>
@@ -38633,7 +38633,7 @@
                           <a:ea typeface="+mn-ea"/>
                           <a:cs typeface="+mn-cs"/>
                         </a:rPr>
-                        <a:t>0.9</a:t>
+                        <a:t>0,9</a:t>
                       </a:r>
                     </a:p>
                   </a:txBody>
@@ -38723,7 +38723,7 @@
                           <a:ea typeface="+mn-ea"/>
                           <a:cs typeface="+mn-cs"/>
                         </a:rPr>
-                        <a:t>11.5</a:t>
+                        <a:t>11,5</a:t>
                       </a:r>
                     </a:p>
                   </a:txBody>
@@ -38806,7 +38806,7 @@
                           <a:ea typeface="+mn-ea"/>
                           <a:cs typeface="+mn-cs"/>
                         </a:rPr>
-                        <a:t>8.5</a:t>
+                        <a:t>8,5</a:t>
                       </a:r>
                     </a:p>
                   </a:txBody>
@@ -38889,7 +38889,7 @@
                           <a:ea typeface="+mn-ea"/>
                           <a:cs typeface="+mn-cs"/>
                         </a:rPr>
-                        <a:t>0.4</a:t>
+                        <a:t>0,4</a:t>
                       </a:r>
                     </a:p>
                   </a:txBody>
@@ -38972,7 +38972,7 @@
                           <a:ea typeface="+mn-ea"/>
                           <a:cs typeface="+mn-cs"/>
                         </a:rPr>
-                        <a:t>16.1</a:t>
+                        <a:t>16,1</a:t>
                       </a:r>
                     </a:p>
                   </a:txBody>
@@ -39992,7 +39992,7 @@
             <a:pPr algn="ctr"/>
             <a:r>
               <a:rPr lang="en-US" sz="2400" dirty="0"/>
-              <a:t>C</a:t>
+              <a:t>С</a:t>
             </a:r>
             <a:r>
               <a:rPr lang="ru-RU" sz="2400" dirty="0"/>
@@ -41302,7 +41302,7 @@
                   <a:schemeClr val="tx1"/>
                 </a:solidFill>
               </a:rPr>
-              <a:t>12.2</a:t>
+              <a:t>12,2</a:t>
             </a:r>
           </a:p>
         </p:txBody>
@@ -41675,7 +41675,7 @@
             <a:pPr algn="ctr"/>
             <a:r>
               <a:rPr lang="en-US" sz="2400" dirty="0"/>
-              <a:t>C</a:t>
+              <a:t>С</a:t>
             </a:r>
             <a:r>
               <a:rPr lang="ru-RU" sz="2400" dirty="0"/>
@@ -42985,7 +42985,7 @@
                   <a:schemeClr val="tx1"/>
                 </a:solidFill>
               </a:rPr>
-              <a:t>11.5</a:t>
+              <a:t>11,5</a:t>
             </a:r>
           </a:p>
         </p:txBody>
@@ -43358,7 +43358,7 @@
             <a:pPr algn="ctr"/>
             <a:r>
               <a:rPr lang="en-US" sz="2400" dirty="0"/>
-              <a:t>C</a:t>
+              <a:t>С</a:t>
             </a:r>
             <a:r>
               <a:rPr lang="ru-RU" sz="2400" dirty="0"/>
@@ -44668,7 +44668,7 @@
                   <a:schemeClr val="tx1"/>
                 </a:solidFill>
               </a:rPr>
-              <a:t>13.5</a:t>
+              <a:t>13,5</a:t>
             </a:r>
           </a:p>
         </p:txBody>
@@ -45041,7 +45041,7 @@
             <a:pPr algn="ctr"/>
             <a:r>
               <a:rPr lang="en-US" sz="2400" dirty="0"/>
-              <a:t>C</a:t>
+              <a:t>С</a:t>
             </a:r>
             <a:r>
               <a:rPr lang="ru-RU" sz="2400" dirty="0"/>
@@ -46351,7 +46351,7 @@
                   <a:schemeClr val="tx1"/>
                 </a:solidFill>
               </a:rPr>
-              <a:t>10.4</a:t>
+              <a:t>10,4</a:t>
             </a:r>
           </a:p>
         </p:txBody>
@@ -46724,7 +46724,7 @@
             <a:pPr algn="ctr"/>
             <a:r>
               <a:rPr lang="en-US" sz="2400" dirty="0"/>
-              <a:t>C</a:t>
+              <a:t>С</a:t>
             </a:r>
             <a:r>
               <a:rPr lang="ru-RU" sz="2400" dirty="0"/>
@@ -47874,7 +47874,7 @@
                   <a:schemeClr val="tx1"/>
                 </a:solidFill>
               </a:rPr>
-              <a:t>5.3</a:t>
+              <a:t>5,3</a:t>
             </a:r>
           </a:p>
         </p:txBody>
@@ -48276,7 +48276,7 @@
             <a:pPr algn="ctr"/>
             <a:r>
               <a:rPr lang="en-US" sz="2400" dirty="0"/>
-              <a:t>C</a:t>
+              <a:t>С</a:t>
             </a:r>
             <a:r>
               <a:rPr lang="ru-RU" sz="2400" dirty="0"/>
@@ -49426,7 +49426,7 @@
                   <a:schemeClr val="tx1"/>
                 </a:solidFill>
               </a:rPr>
-              <a:t>6.4</a:t>
+              <a:t>6,4</a:t>
             </a:r>
           </a:p>
         </p:txBody>
